--- a/reference_content/Slides/pytorch_transfer_learn.pptx
+++ b/reference_content/Slides/pytorch_transfer_learn.pptx
@@ -15,8 +15,8 @@
     <p:sldId id="292" r:id="rId9"/>
     <p:sldId id="256" r:id="rId10"/>
     <p:sldId id="257" r:id="rId11"/>
-    <p:sldId id="270" r:id="rId12"/>
-    <p:sldId id="271" r:id="rId13"/>
+    <p:sldId id="271" r:id="rId12"/>
+    <p:sldId id="270" r:id="rId13"/>
     <p:sldId id="272" r:id="rId14"/>
     <p:sldId id="258" r:id="rId15"/>
     <p:sldId id="259" r:id="rId16"/>
@@ -287,7 +287,7 @@
           <a:p>
             <a:fld id="{FA0E5C29-DB8F-DF48-8AC1-D7AEB99B7F3A}" type="datetimeFigureOut">
               <a:rPr lang="en-US" smtClean="0"/>
-              <a:t>3/27/25</a:t>
+              <a:t>3/23/26</a:t>
             </a:fld>
             <a:endParaRPr lang="en-US"/>
           </a:p>
@@ -498,7 +498,7 @@
           <a:p>
             <a:fld id="{FA0E5C29-DB8F-DF48-8AC1-D7AEB99B7F3A}" type="datetimeFigureOut">
               <a:rPr lang="en-US" smtClean="0"/>
-              <a:t>3/27/25</a:t>
+              <a:t>3/23/26</a:t>
             </a:fld>
             <a:endParaRPr lang="en-US"/>
           </a:p>
@@ -713,7 +713,7 @@
           <a:p>
             <a:fld id="{FA0E5C29-DB8F-DF48-8AC1-D7AEB99B7F3A}" type="datetimeFigureOut">
               <a:rPr lang="en-US" smtClean="0"/>
-              <a:t>3/27/25</a:t>
+              <a:t>3/23/26</a:t>
             </a:fld>
             <a:endParaRPr lang="en-US"/>
           </a:p>
@@ -914,7 +914,7 @@
           <a:p>
             <a:fld id="{FA0E5C29-DB8F-DF48-8AC1-D7AEB99B7F3A}" type="datetimeFigureOut">
               <a:rPr lang="en-US" smtClean="0"/>
-              <a:t>3/27/25</a:t>
+              <a:t>3/23/26</a:t>
             </a:fld>
             <a:endParaRPr lang="en-US"/>
           </a:p>
@@ -1193,7 +1193,7 @@
           <a:p>
             <a:fld id="{FA0E5C29-DB8F-DF48-8AC1-D7AEB99B7F3A}" type="datetimeFigureOut">
               <a:rPr lang="en-US" smtClean="0"/>
-              <a:t>3/27/25</a:t>
+              <a:t>3/23/26</a:t>
             </a:fld>
             <a:endParaRPr lang="en-US"/>
           </a:p>
@@ -1461,7 +1461,7 @@
           <a:p>
             <a:fld id="{FA0E5C29-DB8F-DF48-8AC1-D7AEB99B7F3A}" type="datetimeFigureOut">
               <a:rPr lang="en-US" smtClean="0"/>
-              <a:t>3/27/25</a:t>
+              <a:t>3/23/26</a:t>
             </a:fld>
             <a:endParaRPr lang="en-US"/>
           </a:p>
@@ -1877,7 +1877,7 @@
           <a:p>
             <a:fld id="{FA0E5C29-DB8F-DF48-8AC1-D7AEB99B7F3A}" type="datetimeFigureOut">
               <a:rPr lang="en-US" smtClean="0"/>
-              <a:t>3/27/25</a:t>
+              <a:t>3/23/26</a:t>
             </a:fld>
             <a:endParaRPr lang="en-US"/>
           </a:p>
@@ -2026,7 +2026,7 @@
           <a:p>
             <a:fld id="{FA0E5C29-DB8F-DF48-8AC1-D7AEB99B7F3A}" type="datetimeFigureOut">
               <a:rPr lang="en-US" smtClean="0"/>
-              <a:t>3/27/25</a:t>
+              <a:t>3/23/26</a:t>
             </a:fld>
             <a:endParaRPr lang="en-US"/>
           </a:p>
@@ -2152,7 +2152,7 @@
           <a:p>
             <a:fld id="{FA0E5C29-DB8F-DF48-8AC1-D7AEB99B7F3A}" type="datetimeFigureOut">
               <a:rPr lang="en-US" smtClean="0"/>
-              <a:t>3/27/25</a:t>
+              <a:t>3/23/26</a:t>
             </a:fld>
             <a:endParaRPr lang="en-US"/>
           </a:p>
@@ -2403,7 +2403,7 @@
           <a:p>
             <a:fld id="{FA0E5C29-DB8F-DF48-8AC1-D7AEB99B7F3A}" type="datetimeFigureOut">
               <a:rPr lang="en-US" smtClean="0"/>
-              <a:t>3/27/25</a:t>
+              <a:t>3/23/26</a:t>
             </a:fld>
             <a:endParaRPr lang="en-US"/>
           </a:p>
@@ -2848,7 +2848,7 @@
           <a:p>
             <a:fld id="{FA0E5C29-DB8F-DF48-8AC1-D7AEB99B7F3A}" type="datetimeFigureOut">
               <a:rPr lang="en-US" smtClean="0"/>
-              <a:t>3/27/25</a:t>
+              <a:t>3/23/26</a:t>
             </a:fld>
             <a:endParaRPr lang="en-US"/>
           </a:p>
@@ -3015,6 +3015,13 @@
             <a:schemeClr val="lt1"/>
           </a:fontRef>
         </p:style>
+        <p:txBody>
+          <a:bodyPr/>
+          <a:lstStyle/>
+          <a:p>
+            <a:endParaRPr lang="en-US"/>
+          </a:p>
+        </p:txBody>
       </p:sp>
       <p:pic>
         <p:nvPicPr>
@@ -3175,7 +3182,7 @@
           <a:p>
             <a:fld id="{FA0E5C29-DB8F-DF48-8AC1-D7AEB99B7F3A}" type="datetimeFigureOut">
               <a:rPr lang="en-US" smtClean="0"/>
-              <a:t>3/27/25</a:t>
+              <a:t>3/23/26</a:t>
             </a:fld>
             <a:endParaRPr lang="en-US"/>
           </a:p>
@@ -4018,7 +4025,7 @@
           <p:cNvPr id="2" name="Title 1">
             <a:extLst>
               <a:ext uri="{FF2B5EF4-FFF2-40B4-BE49-F238E27FC236}">
-                <a16:creationId xmlns:a16="http://schemas.microsoft.com/office/drawing/2014/main" id="{16843C67-CC6D-9A4B-96A1-B88E8CC9B90A}"/>
+                <a16:creationId xmlns:a16="http://schemas.microsoft.com/office/drawing/2014/main" id="{5DB88C1C-8AF9-8646-AC13-6FC7D024ABE9}"/>
               </a:ext>
             </a:extLst>
           </p:cNvPr>
@@ -4036,13 +4043,8 @@
           <a:p>
             <a:r>
               <a:rPr lang="en-US" dirty="0"/>
-              <a:t>Big Data - </a:t>
-            </a:r>
-            <a:r>
-              <a:rPr lang="en-US" dirty="0" err="1"/>
-              <a:t>Imagenet</a:t>
-            </a:r>
-            <a:endParaRPr lang="en-US" dirty="0"/>
+              <a:t>Big Processors</a:t>
+            </a:r>
           </a:p>
         </p:txBody>
       </p:sp>
@@ -4051,7 +4053,7 @@
           <p:cNvPr id="3" name="Content Placeholder 2">
             <a:extLst>
               <a:ext uri="{FF2B5EF4-FFF2-40B4-BE49-F238E27FC236}">
-                <a16:creationId xmlns:a16="http://schemas.microsoft.com/office/drawing/2014/main" id="{E6C04FEC-8F3F-1641-BAEC-E1A5BC7C6B11}"/>
+                <a16:creationId xmlns:a16="http://schemas.microsoft.com/office/drawing/2014/main" id="{51D7F542-64F9-1247-9976-2A71C8E4BCE0}"/>
               </a:ext>
             </a:extLst>
           </p:cNvPr>
@@ -4073,10 +4075,10 @@
       </p:sp>
       <p:pic>
         <p:nvPicPr>
-          <p:cNvPr id="6146" name="Picture 2" descr="ImageNet">
+          <p:cNvPr id="7170" name="Picture 2" descr="Configuring a Windows Running Deep Learning Rig | NaadiSpeaks">
             <a:extLst>
               <a:ext uri="{FF2B5EF4-FFF2-40B4-BE49-F238E27FC236}">
-                <a16:creationId xmlns:a16="http://schemas.microsoft.com/office/drawing/2014/main" id="{FE11F77E-98AE-D546-9B83-7BB22BE8DC58}"/>
+                <a16:creationId xmlns:a16="http://schemas.microsoft.com/office/drawing/2014/main" id="{5D5547C9-F56D-0E49-850F-30BC149A643B}"/>
               </a:ext>
             </a:extLst>
           </p:cNvPr>
@@ -4100,8 +4102,8 @@
         </p:blipFill>
         <p:spPr bwMode="auto">
           <a:xfrm>
-            <a:off x="698500" y="1853754"/>
-            <a:ext cx="10795000" cy="4864100"/>
+            <a:off x="1591661" y="1611925"/>
+            <a:ext cx="9323110" cy="5246075"/>
           </a:xfrm>
           <a:prstGeom prst="rect">
             <a:avLst/>
@@ -4121,7 +4123,7 @@
     </p:spTree>
     <p:extLst>
       <p:ext uri="{BB962C8B-B14F-4D97-AF65-F5344CB8AC3E}">
-        <p14:creationId xmlns:p14="http://schemas.microsoft.com/office/powerpoint/2010/main" val="72041368"/>
+        <p14:creationId xmlns:p14="http://schemas.microsoft.com/office/powerpoint/2010/main" val="3165579234"/>
       </p:ext>
     </p:extLst>
   </p:cSld>
@@ -4153,7 +4155,7 @@
           <p:cNvPr id="2" name="Title 1">
             <a:extLst>
               <a:ext uri="{FF2B5EF4-FFF2-40B4-BE49-F238E27FC236}">
-                <a16:creationId xmlns:a16="http://schemas.microsoft.com/office/drawing/2014/main" id="{5DB88C1C-8AF9-8646-AC13-6FC7D024ABE9}"/>
+                <a16:creationId xmlns:a16="http://schemas.microsoft.com/office/drawing/2014/main" id="{16843C67-CC6D-9A4B-96A1-B88E8CC9B90A}"/>
               </a:ext>
             </a:extLst>
           </p:cNvPr>
@@ -4171,8 +4173,13 @@
           <a:p>
             <a:r>
               <a:rPr lang="en-US" dirty="0"/>
-              <a:t>Big Processors</a:t>
-            </a:r>
+              <a:t>Big Data - </a:t>
+            </a:r>
+            <a:r>
+              <a:rPr lang="en-US" dirty="0" err="1"/>
+              <a:t>Imagenet</a:t>
+            </a:r>
+            <a:endParaRPr lang="en-US" dirty="0"/>
           </a:p>
         </p:txBody>
       </p:sp>
@@ -4181,7 +4188,7 @@
           <p:cNvPr id="3" name="Content Placeholder 2">
             <a:extLst>
               <a:ext uri="{FF2B5EF4-FFF2-40B4-BE49-F238E27FC236}">
-                <a16:creationId xmlns:a16="http://schemas.microsoft.com/office/drawing/2014/main" id="{51D7F542-64F9-1247-9976-2A71C8E4BCE0}"/>
+                <a16:creationId xmlns:a16="http://schemas.microsoft.com/office/drawing/2014/main" id="{E6C04FEC-8F3F-1641-BAEC-E1A5BC7C6B11}"/>
               </a:ext>
             </a:extLst>
           </p:cNvPr>
@@ -4203,10 +4210,10 @@
       </p:sp>
       <p:pic>
         <p:nvPicPr>
-          <p:cNvPr id="7170" name="Picture 2" descr="Configuring a Windows Running Deep Learning Rig | NaadiSpeaks">
+          <p:cNvPr id="6146" name="Picture 2" descr="ImageNet">
             <a:extLst>
               <a:ext uri="{FF2B5EF4-FFF2-40B4-BE49-F238E27FC236}">
-                <a16:creationId xmlns:a16="http://schemas.microsoft.com/office/drawing/2014/main" id="{5D5547C9-F56D-0E49-850F-30BC149A643B}"/>
+                <a16:creationId xmlns:a16="http://schemas.microsoft.com/office/drawing/2014/main" id="{FE11F77E-98AE-D546-9B83-7BB22BE8DC58}"/>
               </a:ext>
             </a:extLst>
           </p:cNvPr>
@@ -4230,8 +4237,8 @@
         </p:blipFill>
         <p:spPr bwMode="auto">
           <a:xfrm>
-            <a:off x="1591661" y="1611925"/>
-            <a:ext cx="9323110" cy="5246075"/>
+            <a:off x="698500" y="1853754"/>
+            <a:ext cx="10795000" cy="4864100"/>
           </a:xfrm>
           <a:prstGeom prst="rect">
             <a:avLst/>
@@ -4251,7 +4258,7 @@
     </p:spTree>
     <p:extLst>
       <p:ext uri="{BB962C8B-B14F-4D97-AF65-F5344CB8AC3E}">
-        <p14:creationId xmlns:p14="http://schemas.microsoft.com/office/powerpoint/2010/main" val="3165579234"/>
+        <p14:creationId xmlns:p14="http://schemas.microsoft.com/office/powerpoint/2010/main" val="72041368"/>
       </p:ext>
     </p:extLst>
   </p:cSld>
@@ -4674,11 +4681,11 @@
           <a:p>
             <a:r>
               <a:rPr lang="en-US" dirty="0" err="1"/>
-              <a:t>Keras</a:t>
-            </a:r>
-            <a:r>
-              <a:rPr lang="en-US" dirty="0"/>
-              <a:t> packages many pretrained models that we can download and use. </a:t>
+              <a:t>Pytorch</a:t>
+            </a:r>
+            <a:r>
+              <a:rPr lang="en-US" dirty="0"/>
+              <a:t> and other packages have many pretrained models that we can download and use. </a:t>
             </a:r>
           </a:p>
           <a:p>
@@ -4809,7 +4816,15 @@
             <a:pPr lvl="1"/>
             <a:r>
               <a:rPr lang="en-US" dirty="0"/>
-              <a:t>Word2Vec was a transfer learning application. </a:t>
+              <a:t>Word2Vec was a transfer learning application – </a:t>
+            </a:r>
+            <a:r>
+              <a:rPr lang="en-US" dirty="0" err="1"/>
+              <a:t>emb</a:t>
+            </a:r>
+            <a:r>
+              <a:rPr lang="en-US" dirty="0"/>
+              <a:t> space defined on large corpus.</a:t>
             </a:r>
           </a:p>
           <a:p>
@@ -4826,7 +4841,7 @@
             </a:r>
             <a:r>
               <a:rPr lang="en-US" dirty="0" err="1"/>
-              <a:t>tensorflow</a:t>
+              <a:t>pytorch</a:t>
             </a:r>
             <a:r>
               <a:rPr lang="en-US" dirty="0"/>
@@ -5506,7 +5521,7 @@
         </p:spPr>
         <p:txBody>
           <a:bodyPr>
-            <a:normAutofit lnSpcReduction="10000"/>
+            <a:normAutofit/>
           </a:bodyPr>
           <a:lstStyle/>
           <a:p>
@@ -5519,63 +5534,56 @@
             <a:pPr lvl="1"/>
             <a:r>
               <a:rPr lang="en-US" dirty="0"/>
-              <a:t>Load the pretrained model. </a:t>
+              <a:t>Load the pretrained model, and pay attention to the individual layers. </a:t>
             </a:r>
           </a:p>
           <a:p>
             <a:pPr lvl="2"/>
             <a:r>
               <a:rPr lang="en-US" dirty="0"/>
-              <a:t>Remove the classification layer.</a:t>
+              <a:t>Download the pretrained weights for the model, if that’s a separate step. </a:t>
             </a:r>
           </a:p>
           <a:p>
             <a:pPr lvl="2"/>
             <a:r>
               <a:rPr lang="en-US" dirty="0"/>
-              <a:t>Download the pretrained weights for the model. </a:t>
+              <a:t>Set the convolutional layers to not be trained. They don’t need grad. </a:t>
             </a:r>
           </a:p>
           <a:p>
             <a:pPr lvl="2"/>
             <a:r>
               <a:rPr lang="en-US" dirty="0"/>
-              <a:t>Set the layers to not be trained. </a:t>
+              <a:t>Adapt data, if needed, in preprocessing. </a:t>
+            </a:r>
+          </a:p>
+          <a:p>
+            <a:pPr lvl="1"/>
+            <a:r>
+              <a:rPr lang="en-US" dirty="0"/>
+              <a:t>Attach our own classification layers.</a:t>
             </a:r>
           </a:p>
           <a:p>
             <a:pPr lvl="2"/>
             <a:r>
               <a:rPr lang="en-US" dirty="0"/>
-              <a:t>Adapt data, if needed, in preprocessing. </a:t>
+              <a:t>Output layer + preceding dense layers. </a:t>
             </a:r>
           </a:p>
           <a:p>
             <a:pPr lvl="1"/>
             <a:r>
               <a:rPr lang="en-US" dirty="0"/>
-              <a:t>Attach our own classification layers.</a:t>
+              <a:t>Train on our data. </a:t>
             </a:r>
           </a:p>
           <a:p>
             <a:pPr lvl="2"/>
             <a:r>
               <a:rPr lang="en-US" dirty="0"/>
-              <a:t>Output layer + preceding dense layers. </a:t>
-            </a:r>
-          </a:p>
-          <a:p>
-            <a:pPr lvl="1"/>
-            <a:r>
-              <a:rPr lang="en-US" dirty="0"/>
-              <a:t>Train on our data. </a:t>
-            </a:r>
-          </a:p>
-          <a:p>
-            <a:pPr lvl="2"/>
-            <a:r>
-              <a:rPr lang="en-US" dirty="0"/>
-              <a:t>Only the added layers learn in training. </a:t>
+              <a:t>Only the added layers learn in training. Learn to use what model sees to classify our classes. </a:t>
             </a:r>
           </a:p>
           <a:p>
@@ -5711,7 +5719,7 @@
             <a:pPr lvl="1"/>
             <a:r>
               <a:rPr lang="en-US" dirty="0"/>
-              <a:t>We remove the “top” and set the model to not update its weights.  </a:t>
+              <a:t>We remove the CNN layers and set the model to not update its weights.  </a:t>
             </a:r>
           </a:p>
           <a:p>
@@ -6088,8 +6096,8 @@
         </p:nvSpPr>
         <p:spPr>
           <a:xfrm>
-            <a:off x="1451579" y="2015732"/>
-            <a:ext cx="9603275" cy="4037749"/>
+            <a:off x="1451579" y="1928192"/>
+            <a:ext cx="9603275" cy="4125290"/>
           </a:xfrm>
         </p:spPr>
         <p:txBody>
@@ -6098,7 +6106,7 @@
           <a:p>
             <a:r>
               <a:rPr lang="en-US" dirty="0"/>
-              <a:t>In addition to just removing the output bits, we can allow for retraining of other layers of the network. </a:t>
+              <a:t>In addition to just removing the output bits, we can allow for retraining of other layers.</a:t>
             </a:r>
           </a:p>
           <a:p>
@@ -6139,6 +6147,18 @@
               <a:rPr lang="en-US" dirty="0"/>
               <a:t>If our training set is small, we might end up behind where we started. </a:t>
             </a:r>
+          </a:p>
+          <a:p>
+            <a:pPr lvl="1"/>
+            <a:r>
+              <a:rPr lang="en-US" dirty="0"/>
+              <a:t>Be cautious with doing this, and </a:t>
+            </a:r>
+            <a:r>
+              <a:rPr lang="en-US"/>
+              <a:t>keep the learning rate low. </a:t>
+            </a:r>
+            <a:endParaRPr lang="en-US" dirty="0"/>
           </a:p>
         </p:txBody>
       </p:sp>
@@ -6670,13 +6690,13 @@
         </p:nvSpPr>
         <p:spPr>
           <a:xfrm>
-            <a:off x="5795319" y="2015734"/>
-            <a:ext cx="6153665" cy="4037747"/>
+            <a:off x="5497622" y="1958010"/>
+            <a:ext cx="6694377" cy="4095472"/>
           </a:xfrm>
         </p:spPr>
         <p:txBody>
           <a:bodyPr>
-            <a:normAutofit fontScale="92500" lnSpcReduction="10000"/>
+            <a:normAutofit/>
           </a:bodyPr>
           <a:lstStyle/>
           <a:p>
@@ -6762,24 +6782,7 @@
                 <a:spcPct val="110000"/>
               </a:lnSpc>
             </a:pPr>
-            <a:r>
-              <a:rPr lang="en-US" dirty="0" err="1"/>
-              <a:t>Kreas</a:t>
-            </a:r>
-            <a:r>
-              <a:rPr lang="en-US" dirty="0"/>
-              <a:t> pretrained models: </a:t>
-            </a:r>
-            <a:r>
-              <a:rPr lang="en-US" dirty="0">
-                <a:hlinkClick r:id="rId3"/>
-              </a:rPr>
-              <a:t>https://keras.io/api/applications/</a:t>
-            </a:r>
-            <a:r>
-              <a:rPr lang="en-US" dirty="0"/>
-              <a:t> </a:t>
-            </a:r>
+            <a:endParaRPr lang="en-US" dirty="0"/>
           </a:p>
         </p:txBody>
       </p:sp>
@@ -7324,8 +7327,8 @@
         </p:nvSpPr>
         <p:spPr>
           <a:xfrm>
-            <a:off x="1451579" y="2015732"/>
-            <a:ext cx="9603275" cy="4037749"/>
+            <a:off x="1451579" y="1928192"/>
+            <a:ext cx="9603275" cy="4125290"/>
           </a:xfrm>
         </p:spPr>
         <p:txBody>
@@ -7360,7 +7363,7 @@
           <a:p>
             <a:r>
               <a:rPr lang="en-US" dirty="0"/>
-              <a:t>Creating one large model can cost 10s of millions, or more. </a:t>
+              <a:t>Creating one large model can cost 100s of millions, or more. </a:t>
             </a:r>
           </a:p>
           <a:p>
@@ -8072,15 +8075,7 @@
           <a:p>
             <a:r>
               <a:rPr lang="en-US" dirty="0"/>
-              <a:t>This isn’t retraining, but kind of similar – the question is </a:t>
-            </a:r>
-            <a:r>
-              <a:rPr lang="en-US" dirty="0" err="1"/>
-              <a:t>preseeded</a:t>
-            </a:r>
-            <a:r>
-              <a:rPr lang="en-US" dirty="0"/>
-              <a:t> with context. </a:t>
+              <a:t>This isn’t retraining, but kind of similar – the question is pre-seeded with context. </a:t>
             </a:r>
           </a:p>
           <a:p>
@@ -8325,7 +8320,18 @@
             </a:pPr>
             <a:r>
               <a:rPr lang="en-US" sz="1700" dirty="0"/>
-              <a:t>Smaller models are trainable on more systems. </a:t>
+              <a:t>Smaller models are usable on more systems. </a:t>
+            </a:r>
+          </a:p>
+          <a:p>
+            <a:pPr lvl="1">
+              <a:lnSpc>
+                <a:spcPct val="110000"/>
+              </a:lnSpc>
+            </a:pPr>
+            <a:r>
+              <a:rPr lang="en-US" sz="1500" dirty="0"/>
+              <a:t>Best models often can’t run on consumer HW*. </a:t>
             </a:r>
           </a:p>
         </p:txBody>
@@ -8640,15 +8646,7 @@
             <a:pPr lvl="1"/>
             <a:r>
               <a:rPr lang="en-US" dirty="0"/>
-              <a:t>If this makes you super excited, learning some </a:t>
-            </a:r>
-            <a:r>
-              <a:rPr lang="en-US" dirty="0" err="1"/>
-              <a:t>PyTorch</a:t>
-            </a:r>
-            <a:r>
-              <a:rPr lang="en-US" dirty="0"/>
-              <a:t> is a good summer project. </a:t>
+              <a:t>You will be limited (usually in GPU ram) depending on the machine. </a:t>
             </a:r>
           </a:p>
         </p:txBody>
